--- a/slides/Neural-Lab-Lesson-2.pptx
+++ b/slides/Neural-Lab-Lesson-2.pptx
@@ -513,7 +513,7 @@
           <a:p>
             <a:r>
               <a:rPr lang="en-US" dirty="0"/>
-              <a:t>1 min. Recap in one line: last time your machine scored 100% on your own drawings and dropped on everyone else's, because a machine only knows what it was shown. Today the machine talks instead of looking, and the same thing is going to happen. Keep the energy up; the payoff is the moment the scoreboard is revealed.</a:t>
+              <a:t>1 min for this slide and the next. Recap in one line: last time your machine scored 100% on your own drawings and dropped on everyone else's, because a machine only knows what it was shown. Today the machine talks instead of looking, and the same thing is going to happen. Keep the energy up; the payoff is the moment the scoreboard is revealed.</a:t>
             </a:r>
             <a:endParaRPr lang="en-US" dirty="0"/>
           </a:p>
@@ -601,7 +601,7 @@
           <a:p>
             <a:r>
               <a:rPr lang="en-US" dirty="0"/>
-              <a:t>2 min briefing, then 6 to 8 min of training. Each team picks what its bot reads: one of the starter texts, or a paragraph they paste themselves. Everything they tick is the whole of what it will ever know; nothing else exists for it. Try it before sending: ask about its topic, then about something else, and watch the second answer. One phone per team sends, and sending again replaces the bot, so agree first. Press Open cross-examination when every team's bot is in.</a:t>
+              <a:t>2 min briefing, then 6 min of training. Each team picks what its bot reads: one of the starter texts, or a paragraph they paste themselves. Everything they tick is the whole of what it will ever know; nothing else exists for it. Try it before sending: ask about its topic, then about something else, and watch the second answer. One phone per team sends, and sending again replaces the bot, so agree first. Press Open cross-examination when every team's bot is in.</a:t>
             </a:r>
             <a:endParaRPr lang="en-US" dirty="0"/>
           </a:p>
@@ -689,7 +689,7 @@
           <a:p>
             <a:r>
               <a:rPr lang="en-US" dirty="0"/>
-              <a:t>About 5 min of cross-examining, then 3 min here. Every bot is now questioned by strangers, so the Own team column is a dash: only strangers' votes count, the same rule as the tournament last time. Look at the strips. Each bot is right in exactly one topic, the one it read, and wrong everywhere else. Ask every team: where is your bot's bump? Then: what did it read? Same answer, every time.</a:t>
+              <a:t>5 min of cross-examining, then 2 min here. Every bot is now questioned by strangers, so the Own team column is a dash: only strangers' votes count, the same rule as the tournament last time. Look at the strips. The bots that scored have their bump in exactly one topic — the one they read. A bot with no bump was asked nothing it had read. Ask every team with a bump: where is it? Then: what did it read? Same answer, every time.</a:t>
             </a:r>
             <a:endParaRPr lang="en-US" dirty="0"/>
           </a:p>
@@ -865,7 +865,7 @@
           <a:p>
             <a:r>
               <a:rPr lang="en-US" dirty="0"/>
-              <a:t>2 min. Ask what they remember from last time. Let them say it: 100% on their own drawings, then the drop on everyone else's, because it had only ever seen their pencils. Do not explain further. This lesson makes the same point with words instead of drawings, and it only lands if they get there themselves.</a:t>
+              <a:t>Part of the same minute. Ask what they remember from last time. Let them say it: 100% on their own drawings, then the drop on everyone else's, because it had only ever seen their pencils. Do not explain further. This lesson makes the same point with words instead of drawings, and it only lands if they get there themselves.</a:t>
             </a:r>
             <a:endParaRPr lang="en-US" dirty="0"/>
           </a:p>
@@ -953,7 +953,7 @@
           <a:p>
             <a:r>
               <a:rPr lang="en-US" dirty="0"/>
-              <a:t>3 min. Read the script on the left aloud, slowly. It is the whole briefing. Then the mission. Each verdict is a report on the bot, not a vote for it; say that twice. Do not explain how the bot works or why it might be wrong. They find that out themselves in the next ten minutes.</a:t>
+              <a:t>2 min. Read the script on the left aloud, slowly. It is the whole briefing. Then the mission. Each verdict is a report on the bot, not a vote for it; say that twice. Do not explain how the bot works or why it might be wrong. They find that out themselves in the next ten minutes.</a:t>
             </a:r>
             <a:endParaRPr lang="en-US" dirty="0"/>
           </a:p>
@@ -1129,7 +1129,7 @@
           <a:p>
             <a:r>
               <a:rPr lang="en-US" dirty="0"/>
-              <a:t>About 10 min of chatting. Do not show anything past this point until you have pressed Reveal scoreboard and the room has read the bars. Walk the room; nudge teams towards questions off the history topic. The collapse only lands if they see it before anyone explains it.</a:t>
+              <a:t>About 8 min of chatting. Do not show anything past this point until you have pressed Reveal scoreboard and the room has read the bars. Walk the room; nudge teams towards questions off the history topic. The collapse only lands if they see it before anyone explains it.</a:t>
             </a:r>
             <a:endParaRPr lang="en-US" dirty="0"/>
           </a:p>
@@ -1217,7 +1217,7 @@
           <a:p>
             <a:r>
               <a:rPr lang="en-US" dirty="0"/>
-              <a:t>3 min. Let them read the bars first. Every question got a full-sentence answer; only the history ones were right. Ask the question on the right. Take three answers from the room and agree with none of them: nod, thank them, move on. The next slide is the answer.</a:t>
+              <a:t>2 min. Let them read the bars first. Every question got a full-sentence answer: right on history, mostly wrong on everything else. Ask the question on the right. Take three answers from the room and agree with none of them: nod, thank them, move on. The next two slides are the answer.</a:t>
             </a:r>
             <a:endParaRPr lang="en-US" dirty="0"/>
           </a:p>
@@ -1305,7 +1305,7 @@
           <a:p>
             <a:r>
               <a:rPr lang="en-US" dirty="0"/>
-              <a:t>3 min. Everything HistoryBot has ever read is on this screen: about 2,000 words, nothing else. Highlighted: the words from 'Who built the Taj Mahal?' that it recognised. Say: 'Find the sentence yours came from.' Give them a minute on their phones (HistoryBot tab → Show me everything it has ever read), then take one right answer and one nonsense answer from the room and find both on this screen. Every answer it gave is in here.</a:t>
+              <a:t>3 min. Everything HistoryBot has ever read is on this screen: about 2,000 words, nothing else. Highlighted: the words from 'Who built the Taj Mahal?' that it recognised. Say: 'Find the sentence yours came from.' Give them a minute on their phones (HistoryBot tab → Show me everything it has ever read). Every word it said is in here. Take one answer from the room and find the pieces it was stitched from.</a:t>
             </a:r>
             <a:endParaRPr lang="en-US" dirty="0"/>
           </a:p>
@@ -1393,7 +1393,7 @@
           <a:p>
             <a:r>
               <a:rPr lang="en-US" dirty="0"/>
-              <a:t>3 min. Only now say 'next word'. It read the 2,000 words and counted which word tends to follow which. To answer, it starts from the words in your question that it recognised and picks the most likely next word, then the next, until a full stop. Nothing in there checks whether the sentence is true. It cannot say 'I don't know' because it has no idea what knowing is; it only ever has a next word. Very sure and still wrong: the same lesson as the confidence bar last time. Keep the vocabulary to 'word' and 'bot'.</a:t>
+              <a:t>2 min. Only now say 'next word'. It read the 2,000 words and counted which word tends to follow which. To answer, it starts from the words in your question that it recognised and picks the most likely next word, then the next, until a full stop. Nothing in there checks whether the sentence is true. It cannot say 'I don't know' because it has no idea what knowing is; it only ever has a next word. Very sure and still wrong: the same lesson as the confidence bar last time. Keep the vocabulary to 'word' and 'bot'.</a:t>
             </a:r>
             <a:endParaRPr lang="en-US" dirty="0"/>
           </a:p>
@@ -12881,8 +12881,8 @@
         </p:nvSpPr>
         <p:spPr>
           <a:xfrm>
-            <a:off x="5394960" y="256032"/>
-            <a:ext cx="3429000" cy="566928"/>
+            <a:off x="5394960" y="182880"/>
+            <a:ext cx="3429000" cy="694944"/>
           </a:xfrm>
           <a:prstGeom prst="rect">
             <a:avLst/>
@@ -12896,7 +12896,27 @@
           <a:p>
             <a:pPr algn="r" indent="0" marL="0">
               <a:spcAft>
-                <a:spcPts val="200"/>
+                <a:spcPts val="100"/>
+              </a:spcAft>
+              <a:buNone/>
+            </a:pPr>
+            <a:r>
+              <a:rPr lang="en-US" sz="1050" i="1" dirty="0">
+                <a:solidFill>
+                  <a:srgbClr val="6F6785"/>
+                </a:solidFill>
+                <a:latin typeface="Calibri" pitchFamily="34" charset="0"/>
+                <a:ea typeface="Calibri" pitchFamily="34" charset="-122"/>
+                <a:cs typeface="Calibri" pitchFamily="34" charset="-120"/>
+              </a:rPr>
+              <a:t>On the phone:</a:t>
+            </a:r>
+            <a:endParaRPr lang="en-US" sz="1050" dirty="0"/>
+          </a:p>
+          <a:p>
+            <a:pPr algn="r" indent="0" marL="0">
+              <a:spcAft>
+                <a:spcPts val="100"/>
               </a:spcAft>
               <a:buNone/>
             </a:pPr>
@@ -12916,7 +12936,7 @@
           <a:p>
             <a:pPr algn="r" indent="0" marL="0">
               <a:spcAft>
-                <a:spcPts val="200"/>
+                <a:spcPts val="100"/>
               </a:spcAft>
               <a:buNone/>
             </a:pPr>

--- a/slides/Neural-Lab-Lesson-2.pptx
+++ b/slides/Neural-Lab-Lesson-2.pptx
@@ -689,7 +689,7 @@
           <a:p>
             <a:r>
               <a:rPr lang="en-US" dirty="0"/>
-              <a:t>5 min of cross-examining, then 2 min here. Every bot is now questioned by strangers, so the Own team column is a dash: only strangers' votes count, the same rule as the tournament last time. Look at the strips. The bots that scored have their bump in exactly one topic — the one they read. A bot with no bump was asked nothing it had read. Ask every team with a bump: where is it? Then: what did it read? Same answer, every time.</a:t>
+              <a:t>8 min of cross-examining, then 2 min here. Every bot is now questioned by strangers, so the Own team column is a dash: only strangers' votes count, the same rule as the tournament last time. Look at the strips. The bots that scored have their bump in exactly one topic — the one they read. Two strips here are flat: those bots were asked about things they had never read, and got them wrong — that is what the reds are. Ask every team with a bump: where is it? Then: what did it read? Same answer, every time.</a:t>
             </a:r>
             <a:endParaRPr lang="en-US" dirty="0"/>
           </a:p>
@@ -777,7 +777,7 @@
           <a:p>
             <a:r>
               <a:rPr lang="en-US" dirty="0"/>
-              <a:t>3 min. The wrap, then the exit ticket: one line each, collect them. The big ones, the chatbots on their phones, work the same way, one word at a time, only they have read millions of times more, so the mistakes are rarer and much harder to spot. The question to leave in the room: what did it read, and who chose that?</a:t>
+              <a:t>4 min. The wrap, then the exit ticket: one line each, collect them. The big ones, the chatbots on their phones, work the same way, one word at a time, only they have read millions of times more, so the mistakes are rarer and much harder to spot. The question to leave in the room: what did it read, and who chose that?</a:t>
             </a:r>
             <a:endParaRPr lang="en-US" dirty="0"/>
           </a:p>
@@ -1217,7 +1217,7 @@
           <a:p>
             <a:r>
               <a:rPr lang="en-US" dirty="0"/>
-              <a:t>2 min. Let them read the bars first. Every question got a full-sentence answer: right on history, mostly wrong on everything else. Ask the question on the right. Take three answers from the room and agree with none of them: nod, thank them, move on. The next two slides are the answer.</a:t>
+              <a:t>1 min. Let them read the bars first. Every question got a full-sentence answer: right on history, mostly wrong on everything else. Ask the question on the right. Take three answers from the room and agree with none of them: nod, thank them, move on. The next two slides are the answer.</a:t>
             </a:r>
             <a:endParaRPr lang="en-US" dirty="0"/>
           </a:p>
@@ -10951,8 +10951,8 @@
         </p:nvSpPr>
         <p:spPr>
           <a:xfrm>
-            <a:off x="2057400" y="4343400"/>
-            <a:ext cx="5029200" cy="329184"/>
+            <a:off x="1188720" y="4343400"/>
+            <a:ext cx="6766560" cy="329184"/>
           </a:xfrm>
           <a:prstGeom prst="roundRect">
             <a:avLst>
@@ -10984,7 +10984,7 @@
                 <a:ea typeface="Calibri" pitchFamily="34" charset="-122"/>
                 <a:cs typeface="Calibri" pitchFamily="34" charset="-120"/>
               </a:rPr>
-              <a:t>A MACHINE ONLY KNOWS WHAT IT WAS SHOWN</a:t>
+              <a:t>LAST LESSON: A MACHINE ONLY KNOWS WHAT IT WAS SHOWN</a:t>
             </a:r>
             <a:endParaRPr lang="en-US" sz="1100" dirty="0"/>
           </a:p>
@@ -11143,7 +11143,7 @@
       </p:sp>
       <p:pic>
         <p:nvPicPr>
-          <p:cNvPr id="5" name="Image 0" descr="slides/img/tournament-projector.png">    </p:cNvPr>
+          <p:cNvPr id="5" name="Image 0" descr="slides/img/tournament-projector-r1.png">    </p:cNvPr>
           <p:cNvPicPr>
             <a:picLocks noChangeAspect="1"/>
           </p:cNvPicPr>
@@ -11990,7 +11990,7 @@
                 <a:ea typeface="Calibri" pitchFamily="34" charset="-122"/>
                 <a:cs typeface="Calibri" pitchFamily="34" charset="-120"/>
               </a:rPr>
-              <a:t>the Lobby, as the projector shows it</a:t>
+              <a:t>the Lobby's team list, as students see it</a:t>
             </a:r>
             <a:endParaRPr lang="en-US" sz="1100" dirty="0"/>
           </a:p>
@@ -12929,7 +12929,7 @@
                 <a:ea typeface="Calibri" pitchFamily="34" charset="-122"/>
                 <a:cs typeface="Calibri" pitchFamily="34" charset="-120"/>
               </a:rPr>
-              <a:t>“Recognised 1 of 7 words in your question.”</a:t>
+              <a:t>“Recognised 3 of 5 words in your question.”</a:t>
             </a:r>
             <a:endParaRPr lang="en-US" sz="1050" dirty="0"/>
           </a:p>

--- a/slides/Neural-Lab-Lesson-2.pptx
+++ b/slides/Neural-Lab-Lesson-2.pptx
@@ -12929,7 +12929,7 @@
                 <a:ea typeface="Calibri" pitchFamily="34" charset="-122"/>
                 <a:cs typeface="Calibri" pitchFamily="34" charset="-120"/>
               </a:rPr>
-              <a:t>“Recognised 3 of 5 words in your question.”</a:t>
+              <a:t>“Recognised 3 of 3 words in your question.”</a:t>
             </a:r>
             <a:endParaRPr lang="en-US" sz="1050" dirty="0"/>
           </a:p>
